--- a/12_Defensa/Defensa_PE5_SIGA.pptx
+++ b/12_Defensa/Defensa_PE5_SIGA.pptx
@@ -10496,7 +10496,7 @@
                   <a:srgbClr val="2B2B2B"/>
                 </a:solidFill>
               </a:rPr>
-              <a:t>14 defectos raíz · 71 instancias contables. </a:t>
+              <a:t>15 defectos raíz · 72 instancias contables. </a:t>
             </a:r>
             <a:pPr indent="0" marL="0">
               <a:buNone/>
@@ -13358,7 +13358,7 @@
                             <a:srgbClr val="C8791A"/>
                           </a:solidFill>
                         </a:rPr>
-                        <a:t>1,73</a:t>
+                        <a:t>1,76</a:t>
                       </a:r>
                       <a:endParaRPr lang="en-US" sz="1250" dirty="0"/>
                     </a:p>
